--- a/Si VS Lithiation Thickness.pptx
+++ b/Si VS Lithiation Thickness.pptx
@@ -4,9 +4,14 @@
   <p:sldMasterIdLst>
     <p:sldMasterId id="2147483750" r:id="rId1"/>
   </p:sldMasterIdLst>
+  <p:notesMasterIdLst>
+    <p:notesMasterId r:id="rId6"/>
+  </p:notesMasterIdLst>
   <p:sldIdLst>
     <p:sldId id="256" r:id="rId2"/>
     <p:sldId id="257" r:id="rId3"/>
+    <p:sldId id="258" r:id="rId4"/>
+    <p:sldId id="259" r:id="rId5"/>
   </p:sldIdLst>
   <p:sldSz cx="12192000" cy="6858000"/>
   <p:notesSz cx="6858000" cy="9144000"/>
@@ -105,6 +110,11 @@
       </a:defRPr>
     </a:lvl9pPr>
   </p:defaultTextStyle>
+  <p:extLst>
+    <p:ext uri="{EFAFB233-063F-42B5-8137-9DF3F51BA10A}">
+      <p15:sldGuideLst xmlns:p15="http://schemas.microsoft.com/office/powerpoint/2012/main"/>
+    </p:ext>
+  </p:extLst>
 </p:presentation>
 </file>
 
@@ -430,6 +440,696 @@
 </pc:chgInfo>
 </file>
 
+<file path=ppt/notesMasters/notesMaster1.xml><?xml version="1.0" encoding="utf-8"?>
+<p:notesMaster xmlns:a="http://schemas.openxmlformats.org/drawingml/2006/main" xmlns:r="http://schemas.openxmlformats.org/officeDocument/2006/relationships" xmlns:p="http://schemas.openxmlformats.org/presentationml/2006/main">
+  <p:cSld>
+    <p:bg>
+      <p:bgRef idx="1001">
+        <a:schemeClr val="bg1"/>
+      </p:bgRef>
+    </p:bg>
+    <p:spTree>
+      <p:nvGrpSpPr>
+        <p:cNvPr id="1" name=""/>
+        <p:cNvGrpSpPr/>
+        <p:nvPr/>
+      </p:nvGrpSpPr>
+      <p:grpSpPr>
+        <a:xfrm>
+          <a:off x="0" y="0"/>
+          <a:ext cx="0" cy="0"/>
+          <a:chOff x="0" y="0"/>
+          <a:chExt cx="0" cy="0"/>
+        </a:xfrm>
+      </p:grpSpPr>
+      <p:sp>
+        <p:nvSpPr>
+          <p:cNvPr id="2" name="Header Placeholder 1"/>
+          <p:cNvSpPr>
+            <a:spLocks noGrp="1"/>
+          </p:cNvSpPr>
+          <p:nvPr>
+            <p:ph type="hdr" sz="quarter"/>
+          </p:nvPr>
+        </p:nvSpPr>
+        <p:spPr>
+          <a:xfrm>
+            <a:off x="0" y="0"/>
+            <a:ext cx="2971800" cy="458788"/>
+          </a:xfrm>
+          <a:prstGeom prst="rect">
+            <a:avLst/>
+          </a:prstGeom>
+        </p:spPr>
+        <p:txBody>
+          <a:bodyPr vert="horz" lIns="91440" tIns="45720" rIns="91440" bIns="45720" rtlCol="0"/>
+          <a:lstStyle>
+            <a:lvl1pPr algn="l">
+              <a:defRPr sz="1200"/>
+            </a:lvl1pPr>
+          </a:lstStyle>
+          <a:p>
+            <a:endParaRPr lang="en-CA"/>
+          </a:p>
+        </p:txBody>
+      </p:sp>
+      <p:sp>
+        <p:nvSpPr>
+          <p:cNvPr id="3" name="Date Placeholder 2"/>
+          <p:cNvSpPr>
+            <a:spLocks noGrp="1"/>
+          </p:cNvSpPr>
+          <p:nvPr>
+            <p:ph type="dt" idx="1"/>
+          </p:nvPr>
+        </p:nvSpPr>
+        <p:spPr>
+          <a:xfrm>
+            <a:off x="3884613" y="0"/>
+            <a:ext cx="2971800" cy="458788"/>
+          </a:xfrm>
+          <a:prstGeom prst="rect">
+            <a:avLst/>
+          </a:prstGeom>
+        </p:spPr>
+        <p:txBody>
+          <a:bodyPr vert="horz" lIns="91440" tIns="45720" rIns="91440" bIns="45720" rtlCol="0"/>
+          <a:lstStyle>
+            <a:lvl1pPr algn="r">
+              <a:defRPr sz="1200"/>
+            </a:lvl1pPr>
+          </a:lstStyle>
+          <a:p>
+            <a:fld id="{1E18B9FF-20E4-40E4-9709-57C537703B54}" type="datetimeFigureOut">
+              <a:rPr lang="en-CA" smtClean="0"/>
+              <a:t>2025-12-15</a:t>
+            </a:fld>
+            <a:endParaRPr lang="en-CA"/>
+          </a:p>
+        </p:txBody>
+      </p:sp>
+      <p:sp>
+        <p:nvSpPr>
+          <p:cNvPr id="4" name="Slide Image Placeholder 3"/>
+          <p:cNvSpPr>
+            <a:spLocks noGrp="1" noRot="1" noChangeAspect="1"/>
+          </p:cNvSpPr>
+          <p:nvPr>
+            <p:ph type="sldImg" idx="2"/>
+          </p:nvPr>
+        </p:nvSpPr>
+        <p:spPr>
+          <a:xfrm>
+            <a:off x="685800" y="1143000"/>
+            <a:ext cx="5486400" cy="3086100"/>
+          </a:xfrm>
+          <a:prstGeom prst="rect">
+            <a:avLst/>
+          </a:prstGeom>
+          <a:noFill/>
+          <a:ln w="12700">
+            <a:solidFill>
+              <a:prstClr val="black"/>
+            </a:solidFill>
+          </a:ln>
+        </p:spPr>
+        <p:txBody>
+          <a:bodyPr vert="horz" lIns="91440" tIns="45720" rIns="91440" bIns="45720" rtlCol="0" anchor="ctr"/>
+          <a:lstStyle/>
+          <a:p>
+            <a:endParaRPr lang="en-CA"/>
+          </a:p>
+        </p:txBody>
+      </p:sp>
+      <p:sp>
+        <p:nvSpPr>
+          <p:cNvPr id="5" name="Notes Placeholder 4"/>
+          <p:cNvSpPr>
+            <a:spLocks noGrp="1"/>
+          </p:cNvSpPr>
+          <p:nvPr>
+            <p:ph type="body" sz="quarter" idx="3"/>
+          </p:nvPr>
+        </p:nvSpPr>
+        <p:spPr>
+          <a:xfrm>
+            <a:off x="685800" y="4400550"/>
+            <a:ext cx="5486400" cy="3600450"/>
+          </a:xfrm>
+          <a:prstGeom prst="rect">
+            <a:avLst/>
+          </a:prstGeom>
+        </p:spPr>
+        <p:txBody>
+          <a:bodyPr vert="horz" lIns="91440" tIns="45720" rIns="91440" bIns="45720" rtlCol="0"/>
+          <a:lstStyle/>
+          <a:p>
+            <a:pPr lvl="0"/>
+            <a:r>
+              <a:rPr lang="en-US"/>
+              <a:t>Click to edit Master text styles</a:t>
+            </a:r>
+          </a:p>
+          <a:p>
+            <a:pPr lvl="1"/>
+            <a:r>
+              <a:rPr lang="en-US"/>
+              <a:t>Second level</a:t>
+            </a:r>
+          </a:p>
+          <a:p>
+            <a:pPr lvl="2"/>
+            <a:r>
+              <a:rPr lang="en-US"/>
+              <a:t>Third level</a:t>
+            </a:r>
+          </a:p>
+          <a:p>
+            <a:pPr lvl="3"/>
+            <a:r>
+              <a:rPr lang="en-US"/>
+              <a:t>Fourth level</a:t>
+            </a:r>
+          </a:p>
+          <a:p>
+            <a:pPr lvl="4"/>
+            <a:r>
+              <a:rPr lang="en-US"/>
+              <a:t>Fifth level</a:t>
+            </a:r>
+            <a:endParaRPr lang="en-CA"/>
+          </a:p>
+        </p:txBody>
+      </p:sp>
+      <p:sp>
+        <p:nvSpPr>
+          <p:cNvPr id="6" name="Footer Placeholder 5"/>
+          <p:cNvSpPr>
+            <a:spLocks noGrp="1"/>
+          </p:cNvSpPr>
+          <p:nvPr>
+            <p:ph type="ftr" sz="quarter" idx="4"/>
+          </p:nvPr>
+        </p:nvSpPr>
+        <p:spPr>
+          <a:xfrm>
+            <a:off x="0" y="8685213"/>
+            <a:ext cx="2971800" cy="458787"/>
+          </a:xfrm>
+          <a:prstGeom prst="rect">
+            <a:avLst/>
+          </a:prstGeom>
+        </p:spPr>
+        <p:txBody>
+          <a:bodyPr vert="horz" lIns="91440" tIns="45720" rIns="91440" bIns="45720" rtlCol="0" anchor="b"/>
+          <a:lstStyle>
+            <a:lvl1pPr algn="l">
+              <a:defRPr sz="1200"/>
+            </a:lvl1pPr>
+          </a:lstStyle>
+          <a:p>
+            <a:endParaRPr lang="en-CA"/>
+          </a:p>
+        </p:txBody>
+      </p:sp>
+      <p:sp>
+        <p:nvSpPr>
+          <p:cNvPr id="7" name="Slide Number Placeholder 6"/>
+          <p:cNvSpPr>
+            <a:spLocks noGrp="1"/>
+          </p:cNvSpPr>
+          <p:nvPr>
+            <p:ph type="sldNum" sz="quarter" idx="5"/>
+          </p:nvPr>
+        </p:nvSpPr>
+        <p:spPr>
+          <a:xfrm>
+            <a:off x="3884613" y="8685213"/>
+            <a:ext cx="2971800" cy="458787"/>
+          </a:xfrm>
+          <a:prstGeom prst="rect">
+            <a:avLst/>
+          </a:prstGeom>
+        </p:spPr>
+        <p:txBody>
+          <a:bodyPr vert="horz" lIns="91440" tIns="45720" rIns="91440" bIns="45720" rtlCol="0" anchor="b"/>
+          <a:lstStyle>
+            <a:lvl1pPr algn="r">
+              <a:defRPr sz="1200"/>
+            </a:lvl1pPr>
+          </a:lstStyle>
+          <a:p>
+            <a:fld id="{F39F44F4-2BA4-4FF3-B4AF-6661894D96E7}" type="slidenum">
+              <a:rPr lang="en-CA" smtClean="0"/>
+              <a:t>‹#›</a:t>
+            </a:fld>
+            <a:endParaRPr lang="en-CA"/>
+          </a:p>
+        </p:txBody>
+      </p:sp>
+    </p:spTree>
+    <p:extLst>
+      <p:ext uri="{BB962C8B-B14F-4D97-AF65-F5344CB8AC3E}">
+        <p14:creationId xmlns:p14="http://schemas.microsoft.com/office/powerpoint/2010/main" val="2396665369"/>
+      </p:ext>
+    </p:extLst>
+  </p:cSld>
+  <p:clrMap bg1="lt1" tx1="dk1" bg2="lt2" tx2="dk2" accent1="accent1" accent2="accent2" accent3="accent3" accent4="accent4" accent5="accent5" accent6="accent6" hlink="hlink" folHlink="folHlink"/>
+  <p:notesStyle>
+    <a:lvl1pPr marL="0" algn="l" defTabSz="914400" rtl="0" eaLnBrk="1" latinLnBrk="0" hangingPunct="1">
+      <a:defRPr sz="1200" kern="1200">
+        <a:solidFill>
+          <a:schemeClr val="tx1"/>
+        </a:solidFill>
+        <a:latin typeface="+mn-lt"/>
+        <a:ea typeface="+mn-ea"/>
+        <a:cs typeface="+mn-cs"/>
+      </a:defRPr>
+    </a:lvl1pPr>
+    <a:lvl2pPr marL="457200" algn="l" defTabSz="914400" rtl="0" eaLnBrk="1" latinLnBrk="0" hangingPunct="1">
+      <a:defRPr sz="1200" kern="1200">
+        <a:solidFill>
+          <a:schemeClr val="tx1"/>
+        </a:solidFill>
+        <a:latin typeface="+mn-lt"/>
+        <a:ea typeface="+mn-ea"/>
+        <a:cs typeface="+mn-cs"/>
+      </a:defRPr>
+    </a:lvl2pPr>
+    <a:lvl3pPr marL="914400" algn="l" defTabSz="914400" rtl="0" eaLnBrk="1" latinLnBrk="0" hangingPunct="1">
+      <a:defRPr sz="1200" kern="1200">
+        <a:solidFill>
+          <a:schemeClr val="tx1"/>
+        </a:solidFill>
+        <a:latin typeface="+mn-lt"/>
+        <a:ea typeface="+mn-ea"/>
+        <a:cs typeface="+mn-cs"/>
+      </a:defRPr>
+    </a:lvl3pPr>
+    <a:lvl4pPr marL="1371600" algn="l" defTabSz="914400" rtl="0" eaLnBrk="1" latinLnBrk="0" hangingPunct="1">
+      <a:defRPr sz="1200" kern="1200">
+        <a:solidFill>
+          <a:schemeClr val="tx1"/>
+        </a:solidFill>
+        <a:latin typeface="+mn-lt"/>
+        <a:ea typeface="+mn-ea"/>
+        <a:cs typeface="+mn-cs"/>
+      </a:defRPr>
+    </a:lvl4pPr>
+    <a:lvl5pPr marL="1828800" algn="l" defTabSz="914400" rtl="0" eaLnBrk="1" latinLnBrk="0" hangingPunct="1">
+      <a:defRPr sz="1200" kern="1200">
+        <a:solidFill>
+          <a:schemeClr val="tx1"/>
+        </a:solidFill>
+        <a:latin typeface="+mn-lt"/>
+        <a:ea typeface="+mn-ea"/>
+        <a:cs typeface="+mn-cs"/>
+      </a:defRPr>
+    </a:lvl5pPr>
+    <a:lvl6pPr marL="2286000" algn="l" defTabSz="914400" rtl="0" eaLnBrk="1" latinLnBrk="0" hangingPunct="1">
+      <a:defRPr sz="1200" kern="1200">
+        <a:solidFill>
+          <a:schemeClr val="tx1"/>
+        </a:solidFill>
+        <a:latin typeface="+mn-lt"/>
+        <a:ea typeface="+mn-ea"/>
+        <a:cs typeface="+mn-cs"/>
+      </a:defRPr>
+    </a:lvl6pPr>
+    <a:lvl7pPr marL="2743200" algn="l" defTabSz="914400" rtl="0" eaLnBrk="1" latinLnBrk="0" hangingPunct="1">
+      <a:defRPr sz="1200" kern="1200">
+        <a:solidFill>
+          <a:schemeClr val="tx1"/>
+        </a:solidFill>
+        <a:latin typeface="+mn-lt"/>
+        <a:ea typeface="+mn-ea"/>
+        <a:cs typeface="+mn-cs"/>
+      </a:defRPr>
+    </a:lvl7pPr>
+    <a:lvl8pPr marL="3200400" algn="l" defTabSz="914400" rtl="0" eaLnBrk="1" latinLnBrk="0" hangingPunct="1">
+      <a:defRPr sz="1200" kern="1200">
+        <a:solidFill>
+          <a:schemeClr val="tx1"/>
+        </a:solidFill>
+        <a:latin typeface="+mn-lt"/>
+        <a:ea typeface="+mn-ea"/>
+        <a:cs typeface="+mn-cs"/>
+      </a:defRPr>
+    </a:lvl8pPr>
+    <a:lvl9pPr marL="3657600" algn="l" defTabSz="914400" rtl="0" eaLnBrk="1" latinLnBrk="0" hangingPunct="1">
+      <a:defRPr sz="1200" kern="1200">
+        <a:solidFill>
+          <a:schemeClr val="tx1"/>
+        </a:solidFill>
+        <a:latin typeface="+mn-lt"/>
+        <a:ea typeface="+mn-ea"/>
+        <a:cs typeface="+mn-cs"/>
+      </a:defRPr>
+    </a:lvl9pPr>
+  </p:notesStyle>
+</p:notesMaster>
+</file>
+
+<file path=ppt/notesSlides/notesSlide1.xml><?xml version="1.0" encoding="utf-8"?>
+<p:notes xmlns:a="http://schemas.openxmlformats.org/drawingml/2006/main" xmlns:r="http://schemas.openxmlformats.org/officeDocument/2006/relationships" xmlns:p="http://schemas.openxmlformats.org/presentationml/2006/main">
+  <p:cSld>
+    <p:spTree>
+      <p:nvGrpSpPr>
+        <p:cNvPr id="1" name=""/>
+        <p:cNvGrpSpPr/>
+        <p:nvPr/>
+      </p:nvGrpSpPr>
+      <p:grpSpPr>
+        <a:xfrm>
+          <a:off x="0" y="0"/>
+          <a:ext cx="0" cy="0"/>
+          <a:chOff x="0" y="0"/>
+          <a:chExt cx="0" cy="0"/>
+        </a:xfrm>
+      </p:grpSpPr>
+      <p:sp>
+        <p:nvSpPr>
+          <p:cNvPr id="2" name="Slide Image Placeholder 1"/>
+          <p:cNvSpPr>
+            <a:spLocks noGrp="1" noRot="1" noChangeAspect="1"/>
+          </p:cNvSpPr>
+          <p:nvPr>
+            <p:ph type="sldImg"/>
+          </p:nvPr>
+        </p:nvSpPr>
+        <p:spPr/>
+      </p:sp>
+      <p:sp>
+        <p:nvSpPr>
+          <p:cNvPr id="3" name="Notes Placeholder 2"/>
+          <p:cNvSpPr>
+            <a:spLocks noGrp="1"/>
+          </p:cNvSpPr>
+          <p:nvPr>
+            <p:ph type="body" idx="1"/>
+          </p:nvPr>
+        </p:nvSpPr>
+        <p:spPr/>
+        <p:txBody>
+          <a:bodyPr/>
+          <a:lstStyle/>
+          <a:p>
+            <a:endParaRPr lang="en-CA" dirty="0"/>
+          </a:p>
+        </p:txBody>
+      </p:sp>
+      <p:sp>
+        <p:nvSpPr>
+          <p:cNvPr id="4" name="Slide Number Placeholder 3"/>
+          <p:cNvSpPr>
+            <a:spLocks noGrp="1"/>
+          </p:cNvSpPr>
+          <p:nvPr>
+            <p:ph type="sldNum" sz="quarter" idx="5"/>
+          </p:nvPr>
+        </p:nvSpPr>
+        <p:spPr/>
+        <p:txBody>
+          <a:bodyPr/>
+          <a:lstStyle/>
+          <a:p>
+            <a:fld id="{F39F44F4-2BA4-4FF3-B4AF-6661894D96E7}" type="slidenum">
+              <a:rPr lang="en-CA" smtClean="0"/>
+              <a:t>2</a:t>
+            </a:fld>
+            <a:endParaRPr lang="en-CA"/>
+          </a:p>
+        </p:txBody>
+      </p:sp>
+    </p:spTree>
+    <p:extLst>
+      <p:ext uri="{BB962C8B-B14F-4D97-AF65-F5344CB8AC3E}">
+        <p14:creationId xmlns:p14="http://schemas.microsoft.com/office/powerpoint/2010/main" val="3808710579"/>
+      </p:ext>
+    </p:extLst>
+  </p:cSld>
+  <p:clrMapOvr>
+    <a:masterClrMapping/>
+  </p:clrMapOvr>
+</p:notes>
+</file>
+
+<file path=ppt/notesSlides/notesSlide2.xml><?xml version="1.0" encoding="utf-8"?>
+<p:notes xmlns:a="http://schemas.openxmlformats.org/drawingml/2006/main" xmlns:r="http://schemas.openxmlformats.org/officeDocument/2006/relationships" xmlns:p="http://schemas.openxmlformats.org/presentationml/2006/main">
+  <p:cSld>
+    <p:spTree>
+      <p:nvGrpSpPr>
+        <p:cNvPr id="1" name=""/>
+        <p:cNvGrpSpPr/>
+        <p:nvPr/>
+      </p:nvGrpSpPr>
+      <p:grpSpPr>
+        <a:xfrm>
+          <a:off x="0" y="0"/>
+          <a:ext cx="0" cy="0"/>
+          <a:chOff x="0" y="0"/>
+          <a:chExt cx="0" cy="0"/>
+        </a:xfrm>
+      </p:grpSpPr>
+      <p:sp>
+        <p:nvSpPr>
+          <p:cNvPr id="2" name="Slide Image Placeholder 1"/>
+          <p:cNvSpPr>
+            <a:spLocks noGrp="1" noRot="1" noChangeAspect="1"/>
+          </p:cNvSpPr>
+          <p:nvPr>
+            <p:ph type="sldImg"/>
+          </p:nvPr>
+        </p:nvSpPr>
+        <p:spPr/>
+        <p:txBody>
+          <a:bodyPr/>
+          <a:lstStyle/>
+          <a:p>
+            <a:endParaRPr lang="en-CA"/>
+          </a:p>
+        </p:txBody>
+      </p:sp>
+      <p:sp>
+        <p:nvSpPr>
+          <p:cNvPr id="3" name="Notes Placeholder 2"/>
+          <p:cNvSpPr>
+            <a:spLocks noGrp="1"/>
+          </p:cNvSpPr>
+          <p:nvPr>
+            <p:ph type="body" idx="1"/>
+          </p:nvPr>
+        </p:nvSpPr>
+        <p:spPr/>
+        <p:txBody>
+          <a:bodyPr/>
+          <a:lstStyle/>
+          <a:p>
+            <a:r>
+              <a:rPr lang="en-US" dirty="0"/>
+              <a:t>During repeated lithiation and </a:t>
+            </a:r>
+            <a:r>
+              <a:rPr lang="en-US" dirty="0" err="1"/>
+              <a:t>delithiation</a:t>
+            </a:r>
+            <a:r>
+              <a:rPr lang="en-US" dirty="0"/>
+              <a:t>, spatial heterogeneity is maintained or amplified. </a:t>
+            </a:r>
+          </a:p>
+          <a:p>
+            <a:r>
+              <a:rPr lang="en-US" dirty="0"/>
+              <a:t>Even if average volume expansion is known, </a:t>
+            </a:r>
+            <a:r>
+              <a:rPr lang="en-US" i="1" dirty="0"/>
+              <a:t>local</a:t>
+            </a:r>
+            <a:r>
+              <a:rPr lang="en-US" dirty="0"/>
+              <a:t> expansion mismatches dominate mechanical failure.</a:t>
+            </a:r>
+          </a:p>
+          <a:p>
+            <a:r>
+              <a:rPr lang="en-US" dirty="0"/>
+              <a:t>Sharp boundaries generate significant mechanical strain due to constrained expansion</a:t>
+            </a:r>
+            <a:endParaRPr lang="en-CA" dirty="0"/>
+          </a:p>
+        </p:txBody>
+      </p:sp>
+      <p:sp>
+        <p:nvSpPr>
+          <p:cNvPr id="4" name="Slide Number Placeholder 3"/>
+          <p:cNvSpPr>
+            <a:spLocks noGrp="1"/>
+          </p:cNvSpPr>
+          <p:nvPr>
+            <p:ph type="sldNum" sz="quarter" idx="5"/>
+          </p:nvPr>
+        </p:nvSpPr>
+        <p:spPr/>
+        <p:txBody>
+          <a:bodyPr/>
+          <a:lstStyle/>
+          <a:p>
+            <a:fld id="{F39F44F4-2BA4-4FF3-B4AF-6661894D96E7}" type="slidenum">
+              <a:rPr lang="en-CA" smtClean="0"/>
+              <a:t>3</a:t>
+            </a:fld>
+            <a:endParaRPr lang="en-CA"/>
+          </a:p>
+        </p:txBody>
+      </p:sp>
+    </p:spTree>
+    <p:extLst>
+      <p:ext uri="{BB962C8B-B14F-4D97-AF65-F5344CB8AC3E}">
+        <p14:creationId xmlns:p14="http://schemas.microsoft.com/office/powerpoint/2010/main" val="4254689716"/>
+      </p:ext>
+    </p:extLst>
+  </p:cSld>
+  <p:clrMapOvr>
+    <a:masterClrMapping/>
+  </p:clrMapOvr>
+</p:notes>
+</file>
+
+<file path=ppt/notesSlides/notesSlide3.xml><?xml version="1.0" encoding="utf-8"?>
+<p:notes xmlns:a="http://schemas.openxmlformats.org/drawingml/2006/main" xmlns:r="http://schemas.openxmlformats.org/officeDocument/2006/relationships" xmlns:p="http://schemas.openxmlformats.org/presentationml/2006/main">
+  <p:cSld>
+    <p:spTree>
+      <p:nvGrpSpPr>
+        <p:cNvPr id="1" name=""/>
+        <p:cNvGrpSpPr/>
+        <p:nvPr/>
+      </p:nvGrpSpPr>
+      <p:grpSpPr>
+        <a:xfrm>
+          <a:off x="0" y="0"/>
+          <a:ext cx="0" cy="0"/>
+          <a:chOff x="0" y="0"/>
+          <a:chExt cx="0" cy="0"/>
+        </a:xfrm>
+      </p:grpSpPr>
+      <p:sp>
+        <p:nvSpPr>
+          <p:cNvPr id="2" name="Slide Image Placeholder 1"/>
+          <p:cNvSpPr>
+            <a:spLocks noGrp="1" noRot="1" noChangeAspect="1"/>
+          </p:cNvSpPr>
+          <p:nvPr>
+            <p:ph type="sldImg"/>
+          </p:nvPr>
+        </p:nvSpPr>
+        <p:spPr/>
+        <p:txBody>
+          <a:bodyPr/>
+          <a:lstStyle/>
+          <a:p>
+            <a:endParaRPr lang="en-CA"/>
+          </a:p>
+        </p:txBody>
+      </p:sp>
+      <p:sp>
+        <p:nvSpPr>
+          <p:cNvPr id="3" name="Notes Placeholder 2"/>
+          <p:cNvSpPr>
+            <a:spLocks noGrp="1"/>
+          </p:cNvSpPr>
+          <p:nvPr>
+            <p:ph type="body" idx="1"/>
+          </p:nvPr>
+        </p:nvSpPr>
+        <p:spPr/>
+        <p:txBody>
+          <a:bodyPr/>
+          <a:lstStyle/>
+          <a:p>
+            <a:r>
+              <a:rPr lang="en-US" dirty="0"/>
+              <a:t>SLD: Scattering Length Density</a:t>
+            </a:r>
+            <a:br>
+              <a:rPr lang="en-US" dirty="0"/>
+            </a:br>
+            <a:r>
+              <a:rPr lang="en-US" dirty="0"/>
+              <a:t>If all the dots in the SLD VS x were grouped together, that would mean that the lithiation was even. Thus, different parts of the Si are </a:t>
+            </a:r>
+            <a:r>
+              <a:rPr lang="en-US" dirty="0" err="1"/>
+              <a:t>lithiated</a:t>
+            </a:r>
+            <a:r>
+              <a:rPr lang="en-US" dirty="0"/>
+              <a:t> differently. Even lithiation would mean that for every x, there would be a straight vertical line.</a:t>
+            </a:r>
+          </a:p>
+          <a:p>
+            <a:endParaRPr lang="en-US" dirty="0"/>
+          </a:p>
+          <a:p>
+            <a:r>
+              <a:rPr lang="en-US" dirty="0"/>
+              <a:t>As lithiation proceeds, current decreases while volume expansion continues to increase, indicating ongoing structural changes despite reduced lithium insertion rates.</a:t>
+            </a:r>
+          </a:p>
+          <a:p>
+            <a:r>
+              <a:rPr lang="en-US" dirty="0"/>
+              <a:t>Significant expansion can occur even when current is low, demonstrating that expansion depends on the accumulated lithiation state rather than current alone.</a:t>
+            </a:r>
+          </a:p>
+          <a:p>
+            <a:r>
+              <a:rPr lang="en-US" dirty="0"/>
+              <a:t>Silicon electrodes can exhibit different relative volume expansions at similar lithium contents, depending on the lithiation pathway and current history. This indicates that the mechanical response of silicon is sensitive to lithiation kinetics, not only lithium concentration </a:t>
+            </a:r>
+          </a:p>
+          <a:p>
+            <a:endParaRPr lang="en-CA" dirty="0"/>
+          </a:p>
+        </p:txBody>
+      </p:sp>
+      <p:sp>
+        <p:nvSpPr>
+          <p:cNvPr id="4" name="Slide Number Placeholder 3"/>
+          <p:cNvSpPr>
+            <a:spLocks noGrp="1"/>
+          </p:cNvSpPr>
+          <p:nvPr>
+            <p:ph type="sldNum" sz="quarter" idx="5"/>
+          </p:nvPr>
+        </p:nvSpPr>
+        <p:spPr/>
+        <p:txBody>
+          <a:bodyPr/>
+          <a:lstStyle/>
+          <a:p>
+            <a:fld id="{F39F44F4-2BA4-4FF3-B4AF-6661894D96E7}" type="slidenum">
+              <a:rPr lang="en-CA" smtClean="0"/>
+              <a:t>4</a:t>
+            </a:fld>
+            <a:endParaRPr lang="en-CA"/>
+          </a:p>
+        </p:txBody>
+      </p:sp>
+    </p:spTree>
+    <p:extLst>
+      <p:ext uri="{BB962C8B-B14F-4D97-AF65-F5344CB8AC3E}">
+        <p14:creationId xmlns:p14="http://schemas.microsoft.com/office/powerpoint/2010/main" val="3185162873"/>
+      </p:ext>
+    </p:extLst>
+  </p:cSld>
+  <p:clrMapOvr>
+    <a:masterClrMapping/>
+  </p:clrMapOvr>
+</p:notes>
+</file>
+
 <file path=ppt/slideLayouts/slideLayout1.xml><?xml version="1.0" encoding="utf-8"?>
 <p:sldLayout xmlns:a="http://schemas.openxmlformats.org/drawingml/2006/main" xmlns:r="http://schemas.openxmlformats.org/officeDocument/2006/relationships" xmlns:p="http://schemas.openxmlformats.org/presentationml/2006/main" showMasterSp="0" type="title" preserve="1">
   <p:cSld name="Title Slide">
@@ -490,6 +1190,13 @@
             <a:schemeClr val="lt1"/>
           </a:fontRef>
         </p:style>
+        <p:txBody>
+          <a:bodyPr/>
+          <a:lstStyle/>
+          <a:p>
+            <a:endParaRPr lang="en-CA"/>
+          </a:p>
+        </p:txBody>
       </p:sp>
       <p:sp>
         <p:nvSpPr>
@@ -674,7 +1381,7 @@
           <a:p>
             <a:fld id="{9184DA70-C731-4C70-880D-CCD4705E623C}" type="datetime1">
               <a:rPr lang="en-US" smtClean="0"/>
-              <a:t>12/12/2025</a:t>
+              <a:t>12/15/2025</a:t>
             </a:fld>
             <a:endParaRPr lang="en-US" dirty="0"/>
           </a:p>
@@ -862,7 +1569,7 @@
           <a:p>
             <a:fld id="{B612A279-0833-481D-8C56-F67FD0AC6C50}" type="datetime1">
               <a:rPr lang="en-US" smtClean="0"/>
-              <a:t>12/12/2025</a:t>
+              <a:t>12/15/2025</a:t>
             </a:fld>
             <a:endParaRPr lang="en-US" dirty="0"/>
           </a:p>
@@ -995,6 +1702,13 @@
             <a:schemeClr val="lt1"/>
           </a:fontRef>
         </p:style>
+        <p:txBody>
+          <a:bodyPr/>
+          <a:lstStyle/>
+          <a:p>
+            <a:endParaRPr lang="en-CA"/>
+          </a:p>
+        </p:txBody>
       </p:sp>
       <p:sp>
         <p:nvSpPr>
@@ -1104,7 +1818,7 @@
           <a:p>
             <a:fld id="{6587DA83-5663-4C9C-B9AA-0B40A3DAFF81}" type="datetime1">
               <a:rPr lang="en-US" smtClean="0"/>
-              <a:t>12/12/2025</a:t>
+              <a:t>12/15/2025</a:t>
             </a:fld>
             <a:endParaRPr lang="en-US" dirty="0"/>
           </a:p>
@@ -1292,7 +2006,7 @@
           <a:p>
             <a:fld id="{4BE1D723-8F53-4F53-90B0-1982A396982E}" type="datetime1">
               <a:rPr lang="en-US" smtClean="0"/>
-              <a:t>12/12/2025</a:t>
+              <a:t>12/15/2025</a:t>
             </a:fld>
             <a:endParaRPr lang="en-US" dirty="0"/>
           </a:p>
@@ -1433,6 +2147,13 @@
             <a:schemeClr val="lt1"/>
           </a:fontRef>
         </p:style>
+        <p:txBody>
+          <a:bodyPr/>
+          <a:lstStyle/>
+          <a:p>
+            <a:endParaRPr lang="en-CA"/>
+          </a:p>
+        </p:txBody>
       </p:sp>
       <p:sp>
         <p:nvSpPr>
@@ -1665,7 +2386,7 @@
           <a:p>
             <a:fld id="{97669AF7-7BEB-44E4-9852-375E34362B5B}" type="datetime1">
               <a:rPr lang="en-US" smtClean="0"/>
-              <a:t>12/12/2025</a:t>
+              <a:t>12/15/2025</a:t>
             </a:fld>
             <a:endParaRPr lang="en-US" dirty="0"/>
           </a:p>
@@ -1920,7 +2641,7 @@
           <a:p>
             <a:fld id="{BAAAC38D-0552-4C82-B593-E6124DFADBE2}" type="datetime1">
               <a:rPr lang="en-US" smtClean="0"/>
-              <a:t>12/12/2025</a:t>
+              <a:t>12/15/2025</a:t>
             </a:fld>
             <a:endParaRPr lang="en-US" dirty="0"/>
           </a:p>
@@ -2317,7 +3038,7 @@
           <a:p>
             <a:fld id="{D9DF0F1C-5577-4ACB-BB62-DF8F3C494C7E}" type="datetime1">
               <a:rPr lang="en-US" smtClean="0"/>
-              <a:t>12/12/2025</a:t>
+              <a:t>12/15/2025</a:t>
             </a:fld>
             <a:endParaRPr lang="en-US" dirty="0"/>
           </a:p>
@@ -2453,7 +3174,7 @@
           <a:p>
             <a:fld id="{1775B394-D9F9-4F0C-B15D-605F45CB9E9F}" type="datetime1">
               <a:rPr lang="en-US" smtClean="0"/>
-              <a:t>12/12/2025</a:t>
+              <a:t>12/15/2025</a:t>
             </a:fld>
             <a:endParaRPr lang="en-US" dirty="0"/>
           </a:p>
@@ -2586,6 +3307,13 @@
             <a:schemeClr val="lt1"/>
           </a:fontRef>
         </p:style>
+        <p:txBody>
+          <a:bodyPr/>
+          <a:lstStyle/>
+          <a:p>
+            <a:endParaRPr lang="en-CA"/>
+          </a:p>
+        </p:txBody>
       </p:sp>
       <p:sp>
         <p:nvSpPr>
@@ -2610,7 +3338,7 @@
           <a:p>
             <a:fld id="{39667345-2558-425A-8533-9BFDBCE15005}" type="datetime1">
               <a:rPr lang="en-US" smtClean="0"/>
-              <a:t>12/12/2025</a:t>
+              <a:t>12/15/2025</a:t>
             </a:fld>
             <a:endParaRPr lang="en-US" dirty="0"/>
           </a:p>
@@ -2743,6 +3471,13 @@
             <a:schemeClr val="lt1"/>
           </a:fontRef>
         </p:style>
+        <p:txBody>
+          <a:bodyPr/>
+          <a:lstStyle/>
+          <a:p>
+            <a:endParaRPr lang="en-CA"/>
+          </a:p>
+        </p:txBody>
       </p:sp>
       <p:sp>
         <p:nvSpPr>
@@ -2939,7 +3674,7 @@
           <a:p>
             <a:fld id="{92BEA474-078D-4E9B-9B14-09A87B19DC46}" type="datetime1">
               <a:rPr lang="en-US" smtClean="0"/>
-              <a:t>12/12/2025</a:t>
+              <a:t>12/15/2025</a:t>
             </a:fld>
             <a:endParaRPr lang="en-US" dirty="0"/>
           </a:p>
@@ -3082,6 +3817,13 @@
             <a:schemeClr val="lt1"/>
           </a:fontRef>
         </p:style>
+        <p:txBody>
+          <a:bodyPr/>
+          <a:lstStyle/>
+          <a:p>
+            <a:endParaRPr lang="en-CA"/>
+          </a:p>
+        </p:txBody>
       </p:sp>
       <p:sp>
         <p:nvSpPr>
@@ -3289,7 +4031,7 @@
           <a:p>
             <a:fld id="{4907D986-8816-4272-A432-0437A28A9828}" type="datetime1">
               <a:rPr lang="en-US" smtClean="0"/>
-              <a:t>12/12/2025</a:t>
+              <a:t>12/15/2025</a:t>
             </a:fld>
             <a:endParaRPr lang="en-US" dirty="0"/>
           </a:p>
@@ -3557,7 +4299,7 @@
           <a:p>
             <a:fld id="{62D6E202-B606-4609-B914-27C9371A1F6D}" type="datetime1">
               <a:rPr lang="en-US" smtClean="0"/>
-              <a:t>12/12/2025</a:t>
+              <a:t>12/15/2025</a:t>
             </a:fld>
             <a:endParaRPr lang="en-US" dirty="0"/>
           </a:p>
@@ -4349,6 +5091,14 @@
 <file path=ppt/slides/slide2.xml><?xml version="1.0" encoding="utf-8"?>
 <p:sld xmlns:a="http://schemas.openxmlformats.org/drawingml/2006/main" xmlns:r="http://schemas.openxmlformats.org/officeDocument/2006/relationships" xmlns:p="http://schemas.openxmlformats.org/presentationml/2006/main">
   <p:cSld>
+    <p:bg>
+      <p:bgPr>
+        <a:solidFill>
+          <a:schemeClr val="bg1"/>
+        </a:solidFill>
+        <a:effectLst/>
+      </p:bgPr>
+    </p:bg>
     <p:spTree>
       <p:nvGrpSpPr>
         <p:cNvPr id="1" name=""/>
@@ -4365,6 +5115,68 @@
       </p:grpSpPr>
       <p:sp>
         <p:nvSpPr>
+          <p:cNvPr id="23" name="Rectangle 22">
+            <a:extLst>
+              <a:ext uri="{FF2B5EF4-FFF2-40B4-BE49-F238E27FC236}">
+                <a16:creationId xmlns:a16="http://schemas.microsoft.com/office/drawing/2014/main" id="{E844E128-FF69-4E9F-8327-6B504B3C5AE1}"/>
+              </a:ext>
+              <a:ext uri="{C183D7F6-B498-43B3-948B-1728B52AA6E4}">
+                <adec:decorative xmlns:adec="http://schemas.microsoft.com/office/drawing/2017/decorative" val="1"/>
+              </a:ext>
+            </a:extLst>
+          </p:cNvPr>
+          <p:cNvSpPr>
+            <a:spLocks noGrp="1" noRot="1" noChangeAspect="1" noMove="1" noResize="1" noEditPoints="1" noAdjustHandles="1" noChangeArrowheads="1" noChangeShapeType="1" noTextEdit="1"/>
+          </p:cNvSpPr>
+          <p:nvPr>
+            <p:extLst>
+              <p:ext uri="{386F3935-93C4-4BCD-93E2-E3B085C9AB24}">
+                <p16:designElem xmlns:p16="http://schemas.microsoft.com/office/powerpoint/2015/main" val="1"/>
+              </p:ext>
+            </p:extLst>
+          </p:nvPr>
+        </p:nvSpPr>
+        <p:spPr bwMode="white">
+          <a:xfrm>
+            <a:off x="15" y="0"/>
+            <a:ext cx="12191985" cy="6858000"/>
+          </a:xfrm>
+          <a:prstGeom prst="rect">
+            <a:avLst/>
+          </a:prstGeom>
+          <a:solidFill>
+            <a:srgbClr val="262626"/>
+          </a:solidFill>
+          <a:ln>
+            <a:noFill/>
+          </a:ln>
+        </p:spPr>
+        <p:style>
+          <a:lnRef idx="2">
+            <a:schemeClr val="accent1">
+              <a:shade val="50000"/>
+            </a:schemeClr>
+          </a:lnRef>
+          <a:fillRef idx="1">
+            <a:schemeClr val="accent1"/>
+          </a:fillRef>
+          <a:effectRef idx="0">
+            <a:schemeClr val="accent1"/>
+          </a:effectRef>
+          <a:fontRef idx="minor">
+            <a:schemeClr val="lt1"/>
+          </a:fontRef>
+        </p:style>
+        <p:txBody>
+          <a:bodyPr/>
+          <a:lstStyle/>
+          <a:p>
+            <a:endParaRPr lang="en-CA"/>
+          </a:p>
+        </p:txBody>
+      </p:sp>
+      <p:sp>
+        <p:nvSpPr>
           <p:cNvPr id="2" name="Title 1">
             <a:extLst>
               <a:ext uri="{FF2B5EF4-FFF2-40B4-BE49-F238E27FC236}">
@@ -4379,19 +5191,86 @@
             <p:ph type="title"/>
           </p:nvPr>
         </p:nvSpPr>
-        <p:spPr/>
-        <p:txBody>
-          <a:bodyPr/>
-          <a:lstStyle/>
-          <a:p>
-            <a:r>
-              <a:rPr lang="en-US" dirty="0"/>
+        <p:spPr>
+          <a:xfrm>
+            <a:off x="1097280" y="516835"/>
+            <a:ext cx="5977937" cy="1666501"/>
+          </a:xfrm>
+        </p:spPr>
+        <p:txBody>
+          <a:bodyPr>
+            <a:normAutofit/>
+          </a:bodyPr>
+          <a:lstStyle/>
+          <a:p>
+            <a:r>
+              <a:rPr lang="en-US" sz="4800" dirty="0">
+                <a:solidFill>
+                  <a:srgbClr val="FFFFFF"/>
+                </a:solidFill>
+              </a:rPr>
               <a:t>Core Findings</a:t>
             </a:r>
-            <a:endParaRPr lang="en-CA" dirty="0"/>
-          </a:p>
-        </p:txBody>
-      </p:sp>
+            <a:endParaRPr lang="en-CA" sz="4800" dirty="0">
+              <a:solidFill>
+                <a:srgbClr val="FFFFFF"/>
+              </a:solidFill>
+            </a:endParaRPr>
+          </a:p>
+        </p:txBody>
+      </p:sp>
+      <p:cxnSp>
+        <p:nvCxnSpPr>
+          <p:cNvPr id="25" name="Straight Connector 24">
+            <a:extLst>
+              <a:ext uri="{FF2B5EF4-FFF2-40B4-BE49-F238E27FC236}">
+                <a16:creationId xmlns:a16="http://schemas.microsoft.com/office/drawing/2014/main" id="{055CEADF-09EA-423C-8C45-F94AF44D5AF0}"/>
+              </a:ext>
+              <a:ext uri="{C183D7F6-B498-43B3-948B-1728B52AA6E4}">
+                <adec:decorative xmlns:adec="http://schemas.microsoft.com/office/drawing/2017/decorative" val="1"/>
+              </a:ext>
+            </a:extLst>
+          </p:cNvPr>
+          <p:cNvCxnSpPr>
+            <a:cxnSpLocks noGrp="1" noRot="1" noChangeAspect="1" noMove="1" noResize="1" noEditPoints="1" noAdjustHandles="1" noChangeArrowheads="1" noChangeShapeType="1"/>
+          </p:cNvCxnSpPr>
+          <p:nvPr>
+            <p:extLst>
+              <p:ext uri="{386F3935-93C4-4BCD-93E2-E3B085C9AB24}">
+                <p16:designElem xmlns:p16="http://schemas.microsoft.com/office/powerpoint/2015/main" val="1"/>
+              </p:ext>
+            </p:extLst>
+          </p:nvPr>
+        </p:nvCxnSpPr>
+        <p:spPr>
+          <a:xfrm>
+            <a:off x="1215896" y="2353592"/>
+            <a:ext cx="5303520" cy="0"/>
+          </a:xfrm>
+          <a:prstGeom prst="line">
+            <a:avLst/>
+          </a:prstGeom>
+          <a:ln w="19050">
+            <a:solidFill>
+              <a:schemeClr val="accent1"/>
+            </a:solidFill>
+          </a:ln>
+        </p:spPr>
+        <p:style>
+          <a:lnRef idx="1">
+            <a:schemeClr val="accent1"/>
+          </a:lnRef>
+          <a:fillRef idx="0">
+            <a:schemeClr val="accent1"/>
+          </a:fillRef>
+          <a:effectRef idx="0">
+            <a:schemeClr val="accent1"/>
+          </a:effectRef>
+          <a:fontRef idx="minor">
+            <a:schemeClr val="tx1"/>
+          </a:fontRef>
+        </p:style>
+      </p:cxnSp>
       <p:sp>
         <p:nvSpPr>
           <p:cNvPr id="3" name="Content Placeholder 2">
@@ -4408,19 +5287,727 @@
             <p:ph idx="1"/>
           </p:nvPr>
         </p:nvSpPr>
-        <p:spPr/>
-        <p:txBody>
-          <a:bodyPr/>
-          <a:lstStyle/>
-          <a:p>
-            <a:endParaRPr lang="en-CA" dirty="0"/>
-          </a:p>
-        </p:txBody>
-      </p:sp>
+        <p:spPr>
+          <a:xfrm>
+            <a:off x="1097279" y="2546223"/>
+            <a:ext cx="6123030" cy="3871825"/>
+          </a:xfrm>
+        </p:spPr>
+        <p:txBody>
+          <a:bodyPr>
+            <a:normAutofit lnSpcReduction="10000"/>
+          </a:bodyPr>
+          <a:lstStyle/>
+          <a:p>
+            <a:pPr marL="0" indent="0">
+              <a:lnSpc>
+                <a:spcPct val="90000"/>
+              </a:lnSpc>
+              <a:buNone/>
+            </a:pPr>
+            <a:r>
+              <a:rPr lang="en-US" sz="2000" dirty="0">
+                <a:solidFill>
+                  <a:srgbClr val="FFFFFF"/>
+                </a:solidFill>
+              </a:rPr>
+              <a:t>Lithium uptake is directly responsible for silicon volume expansion.</a:t>
+            </a:r>
+          </a:p>
+          <a:p>
+            <a:pPr lvl="1">
+              <a:lnSpc>
+                <a:spcPct val="90000"/>
+              </a:lnSpc>
+            </a:pPr>
+            <a:r>
+              <a:rPr lang="en-US" dirty="0">
+                <a:solidFill>
+                  <a:srgbClr val="FFFFFF"/>
+                </a:solidFill>
+              </a:rPr>
+              <a:t>The amount of lithium inserted into silicon directly determines the degree of volume expansion. </a:t>
+            </a:r>
+          </a:p>
+          <a:p>
+            <a:pPr marL="0">
+              <a:lnSpc>
+                <a:spcPct val="90000"/>
+              </a:lnSpc>
+              <a:buNone/>
+            </a:pPr>
+            <a:r>
+              <a:rPr lang="en-US" sz="2000" dirty="0">
+                <a:solidFill>
+                  <a:srgbClr val="FFFFFF"/>
+                </a:solidFill>
+              </a:rPr>
+              <a:t>Silicon undergoes alloying reactions with lithium, forming a series of Li</a:t>
+            </a:r>
+            <a:r>
+              <a:rPr lang="en-US" sz="2000" b="1" i="1" baseline="-25000" dirty="0">
+                <a:solidFill>
+                  <a:srgbClr val="FFFFFF"/>
+                </a:solidFill>
+              </a:rPr>
+              <a:t>x </a:t>
+            </a:r>
+            <a:r>
+              <a:rPr lang="en-US" sz="2000" dirty="0">
+                <a:solidFill>
+                  <a:srgbClr val="FFFFFF"/>
+                </a:solidFill>
+              </a:rPr>
+              <a:t>Si phases.</a:t>
+            </a:r>
+          </a:p>
+          <a:p>
+            <a:pPr marL="0">
+              <a:lnSpc>
+                <a:spcPct val="90000"/>
+              </a:lnSpc>
+              <a:buNone/>
+            </a:pPr>
+            <a:r>
+              <a:rPr lang="en-US" sz="2000" dirty="0">
+                <a:solidFill>
+                  <a:srgbClr val="FFFFFF"/>
+                </a:solidFill>
+              </a:rPr>
+              <a:t>This volume expansion is non-uniform creating stress gradients inside the material. </a:t>
+            </a:r>
+          </a:p>
+          <a:p>
+            <a:pPr marL="0">
+              <a:lnSpc>
+                <a:spcPct val="90000"/>
+              </a:lnSpc>
+              <a:buNone/>
+            </a:pPr>
+            <a:r>
+              <a:rPr lang="en-US" sz="2000" dirty="0">
+                <a:solidFill>
+                  <a:srgbClr val="FFFFFF"/>
+                </a:solidFill>
+              </a:rPr>
+              <a:t>Reversibility of volume change is limited.</a:t>
+            </a:r>
+          </a:p>
+          <a:p>
+            <a:pPr marL="0">
+              <a:lnSpc>
+                <a:spcPct val="90000"/>
+              </a:lnSpc>
+              <a:buNone/>
+            </a:pPr>
+            <a:r>
+              <a:rPr lang="en-US" sz="2000" dirty="0">
+                <a:solidFill>
+                  <a:srgbClr val="FFFFFF"/>
+                </a:solidFill>
+              </a:rPr>
+              <a:t>Volume expansion is the root cause of mechanical degradation.</a:t>
+            </a:r>
+          </a:p>
+        </p:txBody>
+      </p:sp>
+      <p:pic>
+        <p:nvPicPr>
+          <p:cNvPr id="10" name="Picture 9" descr="A graph of a stress-strain curve&#10;&#10;AI-generated content may be incorrect.">
+            <a:extLst>
+              <a:ext uri="{FF2B5EF4-FFF2-40B4-BE49-F238E27FC236}">
+                <a16:creationId xmlns:a16="http://schemas.microsoft.com/office/drawing/2014/main" id="{9A0AC6B4-C44D-A3E1-15D1-9D9761CF1A42}"/>
+              </a:ext>
+            </a:extLst>
+          </p:cNvPr>
+          <p:cNvPicPr>
+            <a:picLocks noChangeAspect="1"/>
+          </p:cNvPicPr>
+          <p:nvPr/>
+        </p:nvPicPr>
+        <p:blipFill>
+          <a:blip r:embed="rId3"/>
+          <a:stretch>
+            <a:fillRect/>
+          </a:stretch>
+        </p:blipFill>
+        <p:spPr>
+          <a:xfrm>
+            <a:off x="7711037" y="0"/>
+            <a:ext cx="4480948" cy="6858000"/>
+          </a:xfrm>
+          <a:prstGeom prst="rect">
+            <a:avLst/>
+          </a:prstGeom>
+        </p:spPr>
+      </p:pic>
     </p:spTree>
     <p:extLst>
       <p:ext uri="{BB962C8B-B14F-4D97-AF65-F5344CB8AC3E}">
         <p14:creationId xmlns:p14="http://schemas.microsoft.com/office/powerpoint/2010/main" val="47957158"/>
+      </p:ext>
+    </p:extLst>
+  </p:cSld>
+  <p:clrMapOvr>
+    <a:overrideClrMapping bg1="dk1" tx1="lt1" bg2="dk2" tx2="lt2" accent1="accent1" accent2="accent2" accent3="accent3" accent4="accent4" accent5="accent5" accent6="accent6" hlink="hlink" folHlink="folHlink"/>
+  </p:clrMapOvr>
+</p:sld>
+</file>
+
+<file path=ppt/slides/slide3.xml><?xml version="1.0" encoding="utf-8"?>
+<p:sld xmlns:a="http://schemas.openxmlformats.org/drawingml/2006/main" xmlns:r="http://schemas.openxmlformats.org/officeDocument/2006/relationships" xmlns:p="http://schemas.openxmlformats.org/presentationml/2006/main">
+  <p:cSld>
+    <p:spTree>
+      <p:nvGrpSpPr>
+        <p:cNvPr id="1" name=""/>
+        <p:cNvGrpSpPr/>
+        <p:nvPr/>
+      </p:nvGrpSpPr>
+      <p:grpSpPr>
+        <a:xfrm>
+          <a:off x="0" y="0"/>
+          <a:ext cx="0" cy="0"/>
+          <a:chOff x="0" y="0"/>
+          <a:chExt cx="0" cy="0"/>
+        </a:xfrm>
+      </p:grpSpPr>
+      <p:sp>
+        <p:nvSpPr>
+          <p:cNvPr id="2" name="Title 1">
+            <a:extLst>
+              <a:ext uri="{FF2B5EF4-FFF2-40B4-BE49-F238E27FC236}">
+                <a16:creationId xmlns:a16="http://schemas.microsoft.com/office/drawing/2014/main" id="{9530F1E5-547D-CCE9-E416-31D841EA5130}"/>
+              </a:ext>
+            </a:extLst>
+          </p:cNvPr>
+          <p:cNvSpPr>
+            <a:spLocks noGrp="1"/>
+          </p:cNvSpPr>
+          <p:nvPr>
+            <p:ph type="title"/>
+          </p:nvPr>
+        </p:nvSpPr>
+        <p:spPr/>
+        <p:txBody>
+          <a:bodyPr>
+            <a:normAutofit fontScale="90000"/>
+          </a:bodyPr>
+          <a:lstStyle/>
+          <a:p>
+            <a:r>
+              <a:rPr lang="en-US" dirty="0"/>
+              <a:t>Non-Linear/Non-Uniform Volume Expansion:</a:t>
+            </a:r>
+            <a:endParaRPr lang="en-CA" dirty="0"/>
+          </a:p>
+        </p:txBody>
+      </p:sp>
+      <p:pic>
+        <p:nvPicPr>
+          <p:cNvPr id="5" name="Content Placeholder 4" descr="A close-up of a graph&#10;&#10;AI-generated content may be incorrect.">
+            <a:extLst>
+              <a:ext uri="{FF2B5EF4-FFF2-40B4-BE49-F238E27FC236}">
+                <a16:creationId xmlns:a16="http://schemas.microsoft.com/office/drawing/2014/main" id="{442BFF78-04D9-CE07-4C44-24723A635CBC}"/>
+              </a:ext>
+            </a:extLst>
+          </p:cNvPr>
+          <p:cNvPicPr>
+            <a:picLocks noGrp="1" noChangeAspect="1"/>
+          </p:cNvPicPr>
+          <p:nvPr>
+            <p:ph idx="1"/>
+          </p:nvPr>
+        </p:nvPicPr>
+        <p:blipFill>
+          <a:blip r:embed="rId3"/>
+          <a:stretch>
+            <a:fillRect/>
+          </a:stretch>
+        </p:blipFill>
+        <p:spPr>
+          <a:xfrm>
+            <a:off x="4312596" y="2316843"/>
+            <a:ext cx="6843084" cy="3492272"/>
+          </a:xfrm>
+          <a:prstGeom prst="rect">
+            <a:avLst/>
+          </a:prstGeom>
+        </p:spPr>
+      </p:pic>
+      <p:sp>
+        <p:nvSpPr>
+          <p:cNvPr id="6" name="TextBox 5">
+            <a:extLst>
+              <a:ext uri="{FF2B5EF4-FFF2-40B4-BE49-F238E27FC236}">
+                <a16:creationId xmlns:a16="http://schemas.microsoft.com/office/drawing/2014/main" id="{50F4B973-3FB6-B0B8-E7E0-7A143C00CBB0}"/>
+              </a:ext>
+            </a:extLst>
+          </p:cNvPr>
+          <p:cNvSpPr txBox="1"/>
+          <p:nvPr/>
+        </p:nvSpPr>
+        <p:spPr>
+          <a:xfrm>
+            <a:off x="1162132" y="2127656"/>
+            <a:ext cx="3150464" cy="3970318"/>
+          </a:xfrm>
+          <a:prstGeom prst="rect">
+            <a:avLst/>
+          </a:prstGeom>
+          <a:noFill/>
+        </p:spPr>
+        <p:txBody>
+          <a:bodyPr wrap="square" rtlCol="0">
+            <a:spAutoFit/>
+          </a:bodyPr>
+          <a:lstStyle/>
+          <a:p>
+            <a:r>
+              <a:rPr lang="en-US" b="1" dirty="0"/>
+              <a:t>Important Points to Observe:</a:t>
+            </a:r>
+            <a:endParaRPr lang="en-CA" b="1" dirty="0"/>
+          </a:p>
+          <a:p>
+            <a:pPr marL="285750" indent="-285750">
+              <a:buFont typeface="Arial" panose="020B0604020202020204" pitchFamily="34" charset="0"/>
+              <a:buChar char="•"/>
+            </a:pPr>
+            <a:r>
+              <a:rPr lang="en-CA" dirty="0"/>
+              <a:t>Initial stress formation, mechanical fractures, and irreversible side reactions occur during initial charge/discharge.</a:t>
+            </a:r>
+          </a:p>
+          <a:p>
+            <a:pPr marL="285750" indent="-285750">
+              <a:buFont typeface="Arial" panose="020B0604020202020204" pitchFamily="34" charset="0"/>
+              <a:buChar char="•"/>
+            </a:pPr>
+            <a:r>
+              <a:rPr lang="en-CA" dirty="0"/>
+              <a:t>Spatially heterogeneous (lithium reacts locally, creating regions with different </a:t>
+            </a:r>
+            <a:r>
+              <a:rPr lang="en-CA" b="1" dirty="0"/>
+              <a:t>Li </a:t>
+            </a:r>
+            <a:r>
+              <a:rPr lang="en-CA" dirty="0"/>
+              <a:t>con.)</a:t>
+            </a:r>
+          </a:p>
+          <a:p>
+            <a:pPr marL="285750" indent="-285750">
+              <a:buFont typeface="Arial" panose="020B0604020202020204" pitchFamily="34" charset="0"/>
+              <a:buChar char="•"/>
+            </a:pPr>
+            <a:r>
+              <a:rPr lang="en-US" dirty="0"/>
+              <a:t>Differences in lithiation state create sharp boundaries between expanded and less-expanded regions.</a:t>
+            </a:r>
+            <a:endParaRPr lang="en-CA" dirty="0"/>
+          </a:p>
+          <a:p>
+            <a:pPr marL="285750" indent="-285750">
+              <a:buFont typeface="Arial" panose="020B0604020202020204" pitchFamily="34" charset="0"/>
+              <a:buChar char="•"/>
+            </a:pPr>
+            <a:endParaRPr lang="en-US" dirty="0"/>
+          </a:p>
+        </p:txBody>
+      </p:sp>
+    </p:spTree>
+    <p:extLst>
+      <p:ext uri="{BB962C8B-B14F-4D97-AF65-F5344CB8AC3E}">
+        <p14:creationId xmlns:p14="http://schemas.microsoft.com/office/powerpoint/2010/main" val="3589434893"/>
+      </p:ext>
+    </p:extLst>
+  </p:cSld>
+  <p:clrMapOvr>
+    <a:masterClrMapping/>
+  </p:clrMapOvr>
+</p:sld>
+</file>
+
+<file path=ppt/slides/slide4.xml><?xml version="1.0" encoding="utf-8"?>
+<p:sld xmlns:a="http://schemas.openxmlformats.org/drawingml/2006/main" xmlns:r="http://schemas.openxmlformats.org/officeDocument/2006/relationships" xmlns:p="http://schemas.openxmlformats.org/presentationml/2006/main">
+  <p:cSld>
+    <p:bg>
+      <p:bgPr>
+        <a:solidFill>
+          <a:schemeClr val="bg1"/>
+        </a:solidFill>
+        <a:effectLst/>
+      </p:bgPr>
+    </p:bg>
+    <p:spTree>
+      <p:nvGrpSpPr>
+        <p:cNvPr id="1" name=""/>
+        <p:cNvGrpSpPr/>
+        <p:nvPr/>
+      </p:nvGrpSpPr>
+      <p:grpSpPr>
+        <a:xfrm>
+          <a:off x="0" y="0"/>
+          <a:ext cx="0" cy="0"/>
+          <a:chOff x="0" y="0"/>
+          <a:chExt cx="0" cy="0"/>
+        </a:xfrm>
+      </p:grpSpPr>
+      <p:sp useBgFill="1">
+        <p:nvSpPr>
+          <p:cNvPr id="21" name="Rectangle 20">
+            <a:extLst>
+              <a:ext uri="{FF2B5EF4-FFF2-40B4-BE49-F238E27FC236}">
+                <a16:creationId xmlns:a16="http://schemas.microsoft.com/office/drawing/2014/main" id="{D40791F6-715D-481A-9C4A-3645AECFD5A0}"/>
+              </a:ext>
+              <a:ext uri="{C183D7F6-B498-43B3-948B-1728B52AA6E4}">
+                <adec:decorative xmlns:adec="http://schemas.microsoft.com/office/drawing/2017/decorative" val="1"/>
+              </a:ext>
+            </a:extLst>
+          </p:cNvPr>
+          <p:cNvSpPr>
+            <a:spLocks noGrp="1" noRot="1" noChangeAspect="1" noMove="1" noResize="1" noEditPoints="1" noAdjustHandles="1" noChangeArrowheads="1" noChangeShapeType="1" noTextEdit="1"/>
+          </p:cNvSpPr>
+          <p:nvPr>
+            <p:extLst>
+              <p:ext uri="{386F3935-93C4-4BCD-93E2-E3B085C9AB24}">
+                <p16:designElem xmlns:p16="http://schemas.microsoft.com/office/powerpoint/2015/main" val="1"/>
+              </p:ext>
+            </p:extLst>
+          </p:nvPr>
+        </p:nvSpPr>
+        <p:spPr>
+          <a:xfrm>
+            <a:off x="0" y="0"/>
+            <a:ext cx="12192001" cy="6858000"/>
+          </a:xfrm>
+          <a:prstGeom prst="rect">
+            <a:avLst/>
+          </a:prstGeom>
+          <a:ln>
+            <a:noFill/>
+          </a:ln>
+        </p:spPr>
+        <p:style>
+          <a:lnRef idx="2">
+            <a:schemeClr val="accent1">
+              <a:shade val="50000"/>
+            </a:schemeClr>
+          </a:lnRef>
+          <a:fillRef idx="1">
+            <a:schemeClr val="accent1"/>
+          </a:fillRef>
+          <a:effectRef idx="0">
+            <a:schemeClr val="accent1"/>
+          </a:effectRef>
+          <a:fontRef idx="minor">
+            <a:schemeClr val="lt1"/>
+          </a:fontRef>
+        </p:style>
+        <p:txBody>
+          <a:bodyPr rtlCol="0" anchor="ctr"/>
+          <a:lstStyle/>
+          <a:p>
+            <a:pPr algn="ctr"/>
+            <a:endParaRPr lang="en-US"/>
+          </a:p>
+        </p:txBody>
+      </p:sp>
+      <p:sp>
+        <p:nvSpPr>
+          <p:cNvPr id="2" name="Title 1">
+            <a:extLst>
+              <a:ext uri="{FF2B5EF4-FFF2-40B4-BE49-F238E27FC236}">
+                <a16:creationId xmlns:a16="http://schemas.microsoft.com/office/drawing/2014/main" id="{022A4DE4-D878-372D-118D-D6B03DDD5714}"/>
+              </a:ext>
+            </a:extLst>
+          </p:cNvPr>
+          <p:cNvSpPr>
+            <a:spLocks noGrp="1"/>
+          </p:cNvSpPr>
+          <p:nvPr>
+            <p:ph type="title"/>
+          </p:nvPr>
+        </p:nvSpPr>
+        <p:spPr>
+          <a:xfrm>
+            <a:off x="5117309" y="634946"/>
+            <a:ext cx="6432434" cy="1450757"/>
+          </a:xfrm>
+        </p:spPr>
+        <p:txBody>
+          <a:bodyPr>
+            <a:normAutofit/>
+          </a:bodyPr>
+          <a:lstStyle/>
+          <a:p>
+            <a:r>
+              <a:rPr lang="en-US" sz="4400" dirty="0"/>
+              <a:t>Current Vs Lithiation of Si:</a:t>
+            </a:r>
+            <a:endParaRPr lang="en-CA" sz="4400" dirty="0"/>
+          </a:p>
+        </p:txBody>
+      </p:sp>
+      <p:pic>
+        <p:nvPicPr>
+          <p:cNvPr id="7" name="Content Placeholder 6" descr="A graph of a graph of a graph of a graph of a graph of a graph of a graph of a graph of a graph of a graph of a graph of a graph of a graph of&#10;&#10;AI-generated content may be incorrect.">
+            <a:extLst>
+              <a:ext uri="{FF2B5EF4-FFF2-40B4-BE49-F238E27FC236}">
+                <a16:creationId xmlns:a16="http://schemas.microsoft.com/office/drawing/2014/main" id="{7A357DD7-1C66-203F-B95A-2A80C14BB083}"/>
+              </a:ext>
+            </a:extLst>
+          </p:cNvPr>
+          <p:cNvPicPr>
+            <a:picLocks noChangeAspect="1"/>
+          </p:cNvPicPr>
+          <p:nvPr/>
+        </p:nvPicPr>
+        <p:blipFill>
+          <a:blip r:embed="rId3"/>
+          <a:stretch>
+            <a:fillRect/>
+          </a:stretch>
+        </p:blipFill>
+        <p:spPr>
+          <a:xfrm>
+            <a:off x="368958" y="3531948"/>
+            <a:ext cx="4200168" cy="2131584"/>
+          </a:xfrm>
+          <a:prstGeom prst="rect">
+            <a:avLst/>
+          </a:prstGeom>
+        </p:spPr>
+      </p:pic>
+      <p:cxnSp>
+        <p:nvCxnSpPr>
+          <p:cNvPr id="23" name="Straight Connector 22">
+            <a:extLst>
+              <a:ext uri="{FF2B5EF4-FFF2-40B4-BE49-F238E27FC236}">
+                <a16:creationId xmlns:a16="http://schemas.microsoft.com/office/drawing/2014/main" id="{740F83A4-FAC4-4867-95A5-BBFD280C7BF5}"/>
+              </a:ext>
+              <a:ext uri="{C183D7F6-B498-43B3-948B-1728B52AA6E4}">
+                <adec:decorative xmlns:adec="http://schemas.microsoft.com/office/drawing/2017/decorative" val="1"/>
+              </a:ext>
+            </a:extLst>
+          </p:cNvPr>
+          <p:cNvCxnSpPr>
+            <a:cxnSpLocks noGrp="1" noRot="1" noChangeAspect="1" noMove="1" noResize="1" noEditPoints="1" noAdjustHandles="1" noChangeArrowheads="1" noChangeShapeType="1"/>
+          </p:cNvCxnSpPr>
+          <p:nvPr>
+            <p:extLst>
+              <p:ext uri="{386F3935-93C4-4BCD-93E2-E3B085C9AB24}">
+                <p16:designElem xmlns:p16="http://schemas.microsoft.com/office/powerpoint/2015/main" val="1"/>
+              </p:ext>
+            </p:extLst>
+          </p:nvPr>
+        </p:nvCxnSpPr>
+        <p:spPr>
+          <a:xfrm>
+            <a:off x="5180720" y="2267421"/>
+            <a:ext cx="6035040" cy="0"/>
+          </a:xfrm>
+          <a:prstGeom prst="line">
+            <a:avLst/>
+          </a:prstGeom>
+          <a:ln w="12700">
+            <a:solidFill>
+              <a:schemeClr val="tx1">
+                <a:lumMod val="75000"/>
+                <a:lumOff val="25000"/>
+              </a:schemeClr>
+            </a:solidFill>
+          </a:ln>
+        </p:spPr>
+        <p:style>
+          <a:lnRef idx="1">
+            <a:schemeClr val="accent1"/>
+          </a:lnRef>
+          <a:fillRef idx="0">
+            <a:schemeClr val="accent1"/>
+          </a:fillRef>
+          <a:effectRef idx="0">
+            <a:schemeClr val="accent1"/>
+          </a:effectRef>
+          <a:fontRef idx="minor">
+            <a:schemeClr val="tx1"/>
+          </a:fontRef>
+        </p:style>
+      </p:cxnSp>
+      <p:pic>
+        <p:nvPicPr>
+          <p:cNvPr id="5" name="Content Placeholder 4" descr="A graph of a red line&#10;&#10;AI-generated content may be incorrect.">
+            <a:extLst>
+              <a:ext uri="{FF2B5EF4-FFF2-40B4-BE49-F238E27FC236}">
+                <a16:creationId xmlns:a16="http://schemas.microsoft.com/office/drawing/2014/main" id="{C6FA9B8A-8907-2131-0FB5-84C52DF391BF}"/>
+              </a:ext>
+            </a:extLst>
+          </p:cNvPr>
+          <p:cNvPicPr>
+            <a:picLocks noChangeAspect="1"/>
+          </p:cNvPicPr>
+          <p:nvPr/>
+        </p:nvPicPr>
+        <p:blipFill>
+          <a:blip r:embed="rId4"/>
+          <a:stretch>
+            <a:fillRect/>
+          </a:stretch>
+        </p:blipFill>
+        <p:spPr>
+          <a:xfrm>
+            <a:off x="180803" y="943164"/>
+            <a:ext cx="4388323" cy="1645620"/>
+          </a:xfrm>
+          <a:prstGeom prst="rect">
+            <a:avLst/>
+          </a:prstGeom>
+        </p:spPr>
+      </p:pic>
+      <p:sp>
+        <p:nvSpPr>
+          <p:cNvPr id="18" name="Content Placeholder 17">
+            <a:extLst>
+              <a:ext uri="{FF2B5EF4-FFF2-40B4-BE49-F238E27FC236}">
+                <a16:creationId xmlns:a16="http://schemas.microsoft.com/office/drawing/2014/main" id="{08DA5E4B-7DB9-64F5-AD16-BC3D2BFDC944}"/>
+              </a:ext>
+            </a:extLst>
+          </p:cNvPr>
+          <p:cNvSpPr>
+            <a:spLocks noGrp="1"/>
+          </p:cNvSpPr>
+          <p:nvPr>
+            <p:ph idx="1"/>
+          </p:nvPr>
+        </p:nvSpPr>
+        <p:spPr>
+          <a:xfrm>
+            <a:off x="5180720" y="2407436"/>
+            <a:ext cx="6369022" cy="3461658"/>
+          </a:xfrm>
+        </p:spPr>
+        <p:txBody>
+          <a:bodyPr>
+            <a:normAutofit lnSpcReduction="10000"/>
+          </a:bodyPr>
+          <a:lstStyle/>
+          <a:p>
+            <a:pPr>
+              <a:buFont typeface="Arial" panose="020B0604020202020204" pitchFamily="34" charset="0"/>
+              <a:buChar char="•"/>
+            </a:pPr>
+            <a:r>
+              <a:rPr lang="en-CA" dirty="0"/>
+              <a:t> During potentiostatic lithiation , e</a:t>
+            </a:r>
+            <a:r>
+              <a:rPr lang="en-US" dirty="0" err="1"/>
+              <a:t>lectrochemical</a:t>
+            </a:r>
+            <a:r>
+              <a:rPr lang="en-US" dirty="0"/>
+              <a:t> current reflects the rate of lithium insertion into silicon.</a:t>
+            </a:r>
+          </a:p>
+          <a:p>
+            <a:pPr>
+              <a:buFont typeface="Arial" panose="020B0604020202020204" pitchFamily="34" charset="0"/>
+              <a:buChar char="•"/>
+            </a:pPr>
+            <a:r>
+              <a:rPr lang="en-US" dirty="0"/>
+              <a:t> Different current regimes correspond to different expansion behaviors.</a:t>
+            </a:r>
+          </a:p>
+          <a:p>
+            <a:pPr>
+              <a:buFont typeface="Arial" panose="020B0604020202020204" pitchFamily="34" charset="0"/>
+              <a:buChar char="•"/>
+            </a:pPr>
+            <a:r>
+              <a:rPr lang="en-US" dirty="0"/>
+              <a:t> Nonlinear relationship between current and volume expansion</a:t>
+            </a:r>
+          </a:p>
+          <a:p>
+            <a:pPr>
+              <a:buFont typeface="Arial" panose="020B0604020202020204" pitchFamily="34" charset="0"/>
+              <a:buChar char="•"/>
+            </a:pPr>
+            <a:r>
+              <a:rPr lang="en-US" dirty="0"/>
+              <a:t> Distinct volume increases at similar states of charge</a:t>
+            </a:r>
+          </a:p>
+        </p:txBody>
+      </p:sp>
+      <p:sp>
+        <p:nvSpPr>
+          <p:cNvPr id="25" name="Rectangle 24">
+            <a:extLst>
+              <a:ext uri="{FF2B5EF4-FFF2-40B4-BE49-F238E27FC236}">
+                <a16:creationId xmlns:a16="http://schemas.microsoft.com/office/drawing/2014/main" id="{811CBAFA-D7E0-40A7-BB94-2C05304B407B}"/>
+              </a:ext>
+              <a:ext uri="{C183D7F6-B498-43B3-948B-1728B52AA6E4}">
+                <adec:decorative xmlns:adec="http://schemas.microsoft.com/office/drawing/2017/decorative" val="1"/>
+              </a:ext>
+            </a:extLst>
+          </p:cNvPr>
+          <p:cNvSpPr>
+            <a:spLocks noGrp="1" noRot="1" noChangeAspect="1" noMove="1" noResize="1" noEditPoints="1" noAdjustHandles="1" noChangeArrowheads="1" noChangeShapeType="1" noTextEdit="1"/>
+          </p:cNvSpPr>
+          <p:nvPr>
+            <p:extLst>
+              <p:ext uri="{386F3935-93C4-4BCD-93E2-E3B085C9AB24}">
+                <p16:designElem xmlns:p16="http://schemas.microsoft.com/office/powerpoint/2015/main" val="1"/>
+              </p:ext>
+            </p:extLst>
+          </p:nvPr>
+        </p:nvSpPr>
+        <p:spPr>
+          <a:xfrm>
+            <a:off x="1" y="6400800"/>
+            <a:ext cx="12192000" cy="457200"/>
+          </a:xfrm>
+          <a:prstGeom prst="rect">
+            <a:avLst/>
+          </a:prstGeom>
+          <a:solidFill>
+            <a:srgbClr val="262626"/>
+          </a:solidFill>
+          <a:ln>
+            <a:noFill/>
+          </a:ln>
+        </p:spPr>
+        <p:style>
+          <a:lnRef idx="2">
+            <a:schemeClr val="accent1">
+              <a:shade val="50000"/>
+            </a:schemeClr>
+          </a:lnRef>
+          <a:fillRef idx="1">
+            <a:schemeClr val="accent1"/>
+          </a:fillRef>
+          <a:effectRef idx="0">
+            <a:schemeClr val="accent1"/>
+          </a:effectRef>
+          <a:fontRef idx="minor">
+            <a:schemeClr val="lt1"/>
+          </a:fontRef>
+        </p:style>
+        <p:txBody>
+          <a:bodyPr/>
+          <a:lstStyle/>
+          <a:p>
+            <a:endParaRPr lang="en-CA"/>
+          </a:p>
+        </p:txBody>
+      </p:sp>
+    </p:spTree>
+    <p:extLst>
+      <p:ext uri="{BB962C8B-B14F-4D97-AF65-F5344CB8AC3E}">
+        <p14:creationId xmlns:p14="http://schemas.microsoft.com/office/powerpoint/2010/main" val="3378928321"/>
       </p:ext>
     </p:extLst>
   </p:cSld>
@@ -4711,4 +6298,319 @@
     </a:ext>
   </a:extLst>
 </a:theme>
+</file>
+
+<file path=ppt/theme/theme2.xml><?xml version="1.0" encoding="utf-8"?>
+<a:theme xmlns:a="http://schemas.openxmlformats.org/drawingml/2006/main" name="Office Theme">
+  <a:themeElements>
+    <a:clrScheme name="Office">
+      <a:dk1>
+        <a:sysClr val="windowText" lastClr="000000"/>
+      </a:dk1>
+      <a:lt1>
+        <a:sysClr val="window" lastClr="FFFFFF"/>
+      </a:lt1>
+      <a:dk2>
+        <a:srgbClr val="0E2841"/>
+      </a:dk2>
+      <a:lt2>
+        <a:srgbClr val="E8E8E8"/>
+      </a:lt2>
+      <a:accent1>
+        <a:srgbClr val="156082"/>
+      </a:accent1>
+      <a:accent2>
+        <a:srgbClr val="E97132"/>
+      </a:accent2>
+      <a:accent3>
+        <a:srgbClr val="196B24"/>
+      </a:accent3>
+      <a:accent4>
+        <a:srgbClr val="0F9ED5"/>
+      </a:accent4>
+      <a:accent5>
+        <a:srgbClr val="A02B93"/>
+      </a:accent5>
+      <a:accent6>
+        <a:srgbClr val="4EA72E"/>
+      </a:accent6>
+      <a:hlink>
+        <a:srgbClr val="467886"/>
+      </a:hlink>
+      <a:folHlink>
+        <a:srgbClr val="96607D"/>
+      </a:folHlink>
+    </a:clrScheme>
+    <a:fontScheme name="Office">
+      <a:majorFont>
+        <a:latin typeface="Aptos Display" panose="02110004020202020204"/>
+        <a:ea typeface=""/>
+        <a:cs typeface=""/>
+        <a:font script="Jpan" typeface="游ゴシック Light"/>
+        <a:font script="Hang" typeface="맑은 고딕"/>
+        <a:font script="Hans" typeface="等线 Light"/>
+        <a:font script="Hant" typeface="新細明體"/>
+        <a:font script="Arab" typeface="Times New Roman"/>
+        <a:font script="Hebr" typeface="Times New Roman"/>
+        <a:font script="Thai" typeface="Angsana New"/>
+        <a:font script="Ethi" typeface="Nyala"/>
+        <a:font script="Beng" typeface="Vrinda"/>
+        <a:font script="Gujr" typeface="Shruti"/>
+        <a:font script="Khmr" typeface="MoolBoran"/>
+        <a:font script="Knda" typeface="Tunga"/>
+        <a:font script="Guru" typeface="Raavi"/>
+        <a:font script="Cans" typeface="Euphemia"/>
+        <a:font script="Cher" typeface="Plantagenet Cherokee"/>
+        <a:font script="Yiii" typeface="Microsoft Yi Baiti"/>
+        <a:font script="Tibt" typeface="Microsoft Himalaya"/>
+        <a:font script="Thaa" typeface="MV Boli"/>
+        <a:font script="Deva" typeface="Mangal"/>
+        <a:font script="Telu" typeface="Gautami"/>
+        <a:font script="Taml" typeface="Latha"/>
+        <a:font script="Syrc" typeface="Estrangelo Edessa"/>
+        <a:font script="Orya" typeface="Kalinga"/>
+        <a:font script="Mlym" typeface="Kartika"/>
+        <a:font script="Laoo" typeface="DokChampa"/>
+        <a:font script="Sinh" typeface="Iskoola Pota"/>
+        <a:font script="Mong" typeface="Mongolian Baiti"/>
+        <a:font script="Viet" typeface="Times New Roman"/>
+        <a:font script="Uigh" typeface="Microsoft Uighur"/>
+        <a:font script="Geor" typeface="Sylfaen"/>
+        <a:font script="Armn" typeface="Arial"/>
+        <a:font script="Bugi" typeface="Leelawadee UI"/>
+        <a:font script="Bopo" typeface="Microsoft JhengHei"/>
+        <a:font script="Java" typeface="Javanese Text"/>
+        <a:font script="Lisu" typeface="Segoe UI"/>
+        <a:font script="Mymr" typeface="Myanmar Text"/>
+        <a:font script="Nkoo" typeface="Ebrima"/>
+        <a:font script="Olck" typeface="Nirmala UI"/>
+        <a:font script="Osma" typeface="Ebrima"/>
+        <a:font script="Phag" typeface="Phagspa"/>
+        <a:font script="Syrn" typeface="Estrangelo Edessa"/>
+        <a:font script="Syrj" typeface="Estrangelo Edessa"/>
+        <a:font script="Syre" typeface="Estrangelo Edessa"/>
+        <a:font script="Sora" typeface="Nirmala UI"/>
+        <a:font script="Tale" typeface="Microsoft Tai Le"/>
+        <a:font script="Talu" typeface="Microsoft New Tai Lue"/>
+        <a:font script="Tfng" typeface="Ebrima"/>
+      </a:majorFont>
+      <a:minorFont>
+        <a:latin typeface="Aptos" panose="02110004020202020204"/>
+        <a:ea typeface=""/>
+        <a:cs typeface=""/>
+        <a:font script="Jpan" typeface="游ゴシック"/>
+        <a:font script="Hang" typeface="맑은 고딕"/>
+        <a:font script="Hans" typeface="等线"/>
+        <a:font script="Hant" typeface="新細明體"/>
+        <a:font script="Arab" typeface="Arial"/>
+        <a:font script="Hebr" typeface="Arial"/>
+        <a:font script="Thai" typeface="Cordia New"/>
+        <a:font script="Ethi" typeface="Nyala"/>
+        <a:font script="Beng" typeface="Vrinda"/>
+        <a:font script="Gujr" typeface="Shruti"/>
+        <a:font script="Khmr" typeface="DaunPenh"/>
+        <a:font script="Knda" typeface="Tunga"/>
+        <a:font script="Guru" typeface="Raavi"/>
+        <a:font script="Cans" typeface="Euphemia"/>
+        <a:font script="Cher" typeface="Plantagenet Cherokee"/>
+        <a:font script="Yiii" typeface="Microsoft Yi Baiti"/>
+        <a:font script="Tibt" typeface="Microsoft Himalaya"/>
+        <a:font script="Thaa" typeface="MV Boli"/>
+        <a:font script="Deva" typeface="Mangal"/>
+        <a:font script="Telu" typeface="Gautami"/>
+        <a:font script="Taml" typeface="Latha"/>
+        <a:font script="Syrc" typeface="Estrangelo Edessa"/>
+        <a:font script="Orya" typeface="Kalinga"/>
+        <a:font script="Mlym" typeface="Kartika"/>
+        <a:font script="Laoo" typeface="DokChampa"/>
+        <a:font script="Sinh" typeface="Iskoola Pota"/>
+        <a:font script="Mong" typeface="Mongolian Baiti"/>
+        <a:font script="Viet" typeface="Arial"/>
+        <a:font script="Uigh" typeface="Microsoft Uighur"/>
+        <a:font script="Geor" typeface="Sylfaen"/>
+        <a:font script="Armn" typeface="Arial"/>
+        <a:font script="Bugi" typeface="Leelawadee UI"/>
+        <a:font script="Bopo" typeface="Microsoft JhengHei"/>
+        <a:font script="Java" typeface="Javanese Text"/>
+        <a:font script="Lisu" typeface="Segoe UI"/>
+        <a:font script="Mymr" typeface="Myanmar Text"/>
+        <a:font script="Nkoo" typeface="Ebrima"/>
+        <a:font script="Olck" typeface="Nirmala UI"/>
+        <a:font script="Osma" typeface="Ebrima"/>
+        <a:font script="Phag" typeface="Phagspa"/>
+        <a:font script="Syrn" typeface="Estrangelo Edessa"/>
+        <a:font script="Syrj" typeface="Estrangelo Edessa"/>
+        <a:font script="Syre" typeface="Estrangelo Edessa"/>
+        <a:font script="Sora" typeface="Nirmala UI"/>
+        <a:font script="Tale" typeface="Microsoft Tai Le"/>
+        <a:font script="Talu" typeface="Microsoft New Tai Lue"/>
+        <a:font script="Tfng" typeface="Ebrima"/>
+      </a:minorFont>
+    </a:fontScheme>
+    <a:fmtScheme name="Office">
+      <a:fillStyleLst>
+        <a:solidFill>
+          <a:schemeClr val="phClr"/>
+        </a:solidFill>
+        <a:gradFill rotWithShape="1">
+          <a:gsLst>
+            <a:gs pos="0">
+              <a:schemeClr val="phClr">
+                <a:lumMod val="110000"/>
+                <a:satMod val="105000"/>
+                <a:tint val="67000"/>
+              </a:schemeClr>
+            </a:gs>
+            <a:gs pos="50000">
+              <a:schemeClr val="phClr">
+                <a:lumMod val="105000"/>
+                <a:satMod val="103000"/>
+                <a:tint val="73000"/>
+              </a:schemeClr>
+            </a:gs>
+            <a:gs pos="100000">
+              <a:schemeClr val="phClr">
+                <a:lumMod val="105000"/>
+                <a:satMod val="109000"/>
+                <a:tint val="81000"/>
+              </a:schemeClr>
+            </a:gs>
+          </a:gsLst>
+          <a:lin ang="5400000" scaled="0"/>
+        </a:gradFill>
+        <a:gradFill rotWithShape="1">
+          <a:gsLst>
+            <a:gs pos="0">
+              <a:schemeClr val="phClr">
+                <a:satMod val="103000"/>
+                <a:lumMod val="102000"/>
+                <a:tint val="94000"/>
+              </a:schemeClr>
+            </a:gs>
+            <a:gs pos="50000">
+              <a:schemeClr val="phClr">
+                <a:satMod val="110000"/>
+                <a:lumMod val="100000"/>
+                <a:shade val="100000"/>
+              </a:schemeClr>
+            </a:gs>
+            <a:gs pos="100000">
+              <a:schemeClr val="phClr">
+                <a:lumMod val="99000"/>
+                <a:satMod val="120000"/>
+                <a:shade val="78000"/>
+              </a:schemeClr>
+            </a:gs>
+          </a:gsLst>
+          <a:lin ang="5400000" scaled="0"/>
+        </a:gradFill>
+      </a:fillStyleLst>
+      <a:lnStyleLst>
+        <a:ln w="12700" cap="flat" cmpd="sng" algn="ctr">
+          <a:solidFill>
+            <a:schemeClr val="phClr"/>
+          </a:solidFill>
+          <a:prstDash val="solid"/>
+          <a:miter lim="800000"/>
+        </a:ln>
+        <a:ln w="19050" cap="flat" cmpd="sng" algn="ctr">
+          <a:solidFill>
+            <a:schemeClr val="phClr"/>
+          </a:solidFill>
+          <a:prstDash val="solid"/>
+          <a:miter lim="800000"/>
+        </a:ln>
+        <a:ln w="25400" cap="flat" cmpd="sng" algn="ctr">
+          <a:solidFill>
+            <a:schemeClr val="phClr"/>
+          </a:solidFill>
+          <a:prstDash val="solid"/>
+          <a:miter lim="800000"/>
+        </a:ln>
+      </a:lnStyleLst>
+      <a:effectStyleLst>
+        <a:effectStyle>
+          <a:effectLst/>
+        </a:effectStyle>
+        <a:effectStyle>
+          <a:effectLst/>
+        </a:effectStyle>
+        <a:effectStyle>
+          <a:effectLst>
+            <a:outerShdw blurRad="57150" dist="19050" dir="5400000" algn="ctr" rotWithShape="0">
+              <a:srgbClr val="000000">
+                <a:alpha val="63000"/>
+              </a:srgbClr>
+            </a:outerShdw>
+          </a:effectLst>
+        </a:effectStyle>
+      </a:effectStyleLst>
+      <a:bgFillStyleLst>
+        <a:solidFill>
+          <a:schemeClr val="phClr"/>
+        </a:solidFill>
+        <a:solidFill>
+          <a:schemeClr val="phClr">
+            <a:tint val="95000"/>
+            <a:satMod val="170000"/>
+          </a:schemeClr>
+        </a:solidFill>
+        <a:gradFill rotWithShape="1">
+          <a:gsLst>
+            <a:gs pos="0">
+              <a:schemeClr val="phClr">
+                <a:tint val="93000"/>
+                <a:satMod val="150000"/>
+                <a:shade val="98000"/>
+                <a:lumMod val="102000"/>
+              </a:schemeClr>
+            </a:gs>
+            <a:gs pos="50000">
+              <a:schemeClr val="phClr">
+                <a:tint val="98000"/>
+                <a:satMod val="130000"/>
+                <a:shade val="90000"/>
+                <a:lumMod val="103000"/>
+              </a:schemeClr>
+            </a:gs>
+            <a:gs pos="100000">
+              <a:schemeClr val="phClr">
+                <a:shade val="63000"/>
+                <a:satMod val="120000"/>
+              </a:schemeClr>
+            </a:gs>
+          </a:gsLst>
+          <a:lin ang="5400000" scaled="0"/>
+        </a:gradFill>
+      </a:bgFillStyleLst>
+    </a:fmtScheme>
+  </a:themeElements>
+  <a:objectDefaults>
+    <a:lnDef>
+      <a:spPr/>
+      <a:bodyPr/>
+      <a:lstStyle/>
+      <a:style>
+        <a:lnRef idx="2">
+          <a:schemeClr val="accent1"/>
+        </a:lnRef>
+        <a:fillRef idx="0">
+          <a:schemeClr val="accent1"/>
+        </a:fillRef>
+        <a:effectRef idx="1">
+          <a:schemeClr val="accent1"/>
+        </a:effectRef>
+        <a:fontRef idx="minor">
+          <a:schemeClr val="tx1"/>
+        </a:fontRef>
+      </a:style>
+    </a:lnDef>
+  </a:objectDefaults>
+  <a:extraClrSchemeLst/>
+  <a:extLst>
+    <a:ext uri="{05A4C25C-085E-4340-85A3-A5531E510DB2}">
+      <thm15:themeFamily xmlns:thm15="http://schemas.microsoft.com/office/thememl/2012/main" name="Office Theme" id="{2E142A2C-CD16-42D6-873A-C26D2A0506FA}" vid="{1BDDFF52-6CD6-40A5-AB3C-68EB2F1E4D0A}"/>
+    </a:ext>
+  </a:extLst>
+</a:theme>
 </file>